--- a/Group08/document/2026CV_G08_汇报总结.pptx
+++ b/Group08/document/2026CV_G08_汇报总结.pptx
@@ -6,7 +6,7 @@
     <p:sldMasterId id="2147483660" r:id="rId2"/>
   </p:sldMasterIdLst>
   <p:notesMasterIdLst>
-    <p:notesMasterId r:id="rId9"/>
+    <p:notesMasterId r:id="rId10"/>
   </p:notesMasterIdLst>
   <p:sldIdLst>
     <p:sldId id="256" r:id="rId3"/>
@@ -15,6 +15,7 @@
     <p:sldId id="259" r:id="rId6"/>
     <p:sldId id="260" r:id="rId7"/>
     <p:sldId id="261" r:id="rId8"/>
+    <p:sldId id="263" r:id="rId9"/>
   </p:sldIdLst>
   <p:sldSz cx="12192000" cy="6858000"/>
   <p:notesSz cx="6858000" cy="9144000"/>
@@ -348,7 +349,7 @@
           <a:p>
             <a:fld id="{B7268E1E-0E44-426D-905E-8AD9B19D2182}" type="datetimeFigureOut">
               <a:rPr lang="cs-CZ" smtClean="0"/>
-              <a:t>15.06.2026</a:t>
+              <a:t>29.06.2026</a:t>
             </a:fld>
             <a:endParaRPr lang="cs-CZ"/>
           </a:p>
@@ -1995,6 +1996,281 @@
         </p:txBody>
       </p:sp>
     </p:spTree>
+  </p:cSld>
+  <p:clrMapOvr>
+    <a:masterClrMapping/>
+  </p:clrMapOvr>
+</p:notes>
+</file>
+
+<file path=ppt/notesSlides/notesSlide7.xml><?xml version="1.0" encoding="utf-8"?>
+<p:notes xmlns:a="http://schemas.openxmlformats.org/drawingml/2006/main" xmlns:r="http://schemas.openxmlformats.org/officeDocument/2006/relationships" xmlns:p="http://schemas.openxmlformats.org/presentationml/2006/main">
+  <p:cSld>
+    <p:spTree>
+      <p:nvGrpSpPr>
+        <p:cNvPr id="1" name="">
+          <a:extLst>
+            <a:ext uri="{FF2B5EF4-FFF2-40B4-BE49-F238E27FC236}">
+              <a16:creationId xmlns:a16="http://schemas.microsoft.com/office/drawing/2014/main" id="{588ED1CA-7DD6-F21E-FA76-CF04E0D695A3}"/>
+            </a:ext>
+          </a:extLst>
+        </p:cNvPr>
+        <p:cNvGrpSpPr/>
+        <p:nvPr/>
+      </p:nvGrpSpPr>
+      <p:grpSpPr>
+        <a:xfrm>
+          <a:off x="0" y="0"/>
+          <a:ext cx="0" cy="0"/>
+          <a:chOff x="0" y="0"/>
+          <a:chExt cx="0" cy="0"/>
+        </a:xfrm>
+      </p:grpSpPr>
+      <p:sp>
+        <p:nvSpPr>
+          <p:cNvPr id="2" name="Header Placeholder 1">
+            <a:extLst>
+              <a:ext uri="{FF2B5EF4-FFF2-40B4-BE49-F238E27FC236}">
+                <a16:creationId xmlns:a16="http://schemas.microsoft.com/office/drawing/2014/main" id="{BA22C87E-3454-B202-056A-40FA460FB1BC}"/>
+              </a:ext>
+            </a:extLst>
+          </p:cNvPr>
+          <p:cNvSpPr>
+            <a:spLocks noGrp="1"/>
+          </p:cNvSpPr>
+          <p:nvPr>
+            <p:ph type="hdr" sz="quarter"/>
+          </p:nvPr>
+        </p:nvSpPr>
+        <p:spPr>
+          <a:xfrm>
+            <a:off x="0" y="0"/>
+            <a:ext cx="3962400" cy="342900"/>
+          </a:xfrm>
+          <a:prstGeom prst="rect">
+            <a:avLst/>
+          </a:prstGeom>
+        </p:spPr>
+        <p:txBody>
+          <a:bodyPr vert="horz" lIns="91440" tIns="45720" rIns="91440" bIns="45720" rtlCol="0"/>
+          <a:lstStyle>
+            <a:lvl1pPr algn="l">
+              <a:defRPr sz="1200"/>
+            </a:lvl1pPr>
+          </a:lstStyle>
+          <a:p>
+            <a:endParaRPr/>
+          </a:p>
+        </p:txBody>
+      </p:sp>
+      <p:sp>
+        <p:nvSpPr>
+          <p:cNvPr id="3" name="Date Placeholder 2">
+            <a:extLst>
+              <a:ext uri="{FF2B5EF4-FFF2-40B4-BE49-F238E27FC236}">
+                <a16:creationId xmlns:a16="http://schemas.microsoft.com/office/drawing/2014/main" id="{A00A6986-68E4-6A3F-C810-BA496468E8E9}"/>
+              </a:ext>
+            </a:extLst>
+          </p:cNvPr>
+          <p:cNvSpPr>
+            <a:spLocks noGrp="1"/>
+          </p:cNvSpPr>
+          <p:nvPr>
+            <p:ph type="dt" idx="1"/>
+          </p:nvPr>
+        </p:nvSpPr>
+        <p:spPr>
+          <a:xfrm>
+            <a:off x="5180013" y="0"/>
+            <a:ext cx="3962400" cy="342900"/>
+          </a:xfrm>
+          <a:prstGeom prst="rect">
+            <a:avLst/>
+          </a:prstGeom>
+        </p:spPr>
+        <p:txBody>
+          <a:bodyPr vert="horz" lIns="91440" tIns="45720" rIns="91440" bIns="45720" rtlCol="0"/>
+          <a:lstStyle>
+            <a:lvl1pPr algn="r">
+              <a:defRPr sz="1200"/>
+            </a:lvl1pPr>
+          </a:lstStyle>
+          <a:p>
+            <a:r>
+              <a:rPr lang="cs-CZ"/>
+              <a:t>1.7.2013</a:t>
+            </a:r>
+          </a:p>
+        </p:txBody>
+      </p:sp>
+      <p:sp>
+        <p:nvSpPr>
+          <p:cNvPr id="4" name="Slide Image Placeholder 3">
+            <a:extLst>
+              <a:ext uri="{FF2B5EF4-FFF2-40B4-BE49-F238E27FC236}">
+                <a16:creationId xmlns:a16="http://schemas.microsoft.com/office/drawing/2014/main" id="{51B3F420-056A-FE75-9E36-78F21ECCA871}"/>
+              </a:ext>
+            </a:extLst>
+          </p:cNvPr>
+          <p:cNvSpPr>
+            <a:spLocks noGrp="1" noRot="1" noChangeAspect="1"/>
+          </p:cNvSpPr>
+          <p:nvPr>
+            <p:ph type="sldImg" idx="2"/>
+          </p:nvPr>
+        </p:nvSpPr>
+        <p:spPr>
+          <a:xfrm>
+            <a:off x="2290763" y="512763"/>
+            <a:ext cx="4562475" cy="2566987"/>
+          </a:xfrm>
+          <a:prstGeom prst="rect">
+            <a:avLst/>
+          </a:prstGeom>
+          <a:noFill/>
+          <a:ln w="12700">
+            <a:solidFill>
+              <a:prstClr val="black"/>
+            </a:solidFill>
+          </a:ln>
+        </p:spPr>
+        <p:txBody>
+          <a:bodyPr vert="horz" lIns="91440" tIns="45720" rIns="91440" bIns="45720" rtlCol="0" anchor="ctr"/>
+          <a:lstStyle/>
+          <a:p>
+            <a:endParaRPr/>
+          </a:p>
+        </p:txBody>
+      </p:sp>
+      <p:sp>
+        <p:nvSpPr>
+          <p:cNvPr id="5" name="Notes Placeholder 4">
+            <a:extLst>
+              <a:ext uri="{FF2B5EF4-FFF2-40B4-BE49-F238E27FC236}">
+                <a16:creationId xmlns:a16="http://schemas.microsoft.com/office/drawing/2014/main" id="{D65794E0-8699-908D-ADFD-77B42E1246F4}"/>
+              </a:ext>
+            </a:extLst>
+          </p:cNvPr>
+          <p:cNvSpPr>
+            <a:spLocks noGrp="1"/>
+          </p:cNvSpPr>
+          <p:nvPr>
+            <p:ph type="body" sz="quarter" idx="3"/>
+          </p:nvPr>
+        </p:nvSpPr>
+        <p:spPr>
+          <a:xfrm>
+            <a:off x="914400" y="3251200"/>
+            <a:ext cx="7315200" cy="3081338"/>
+          </a:xfrm>
+          <a:prstGeom prst="rect">
+            <a:avLst/>
+          </a:prstGeom>
+        </p:spPr>
+        <p:txBody>
+          <a:bodyPr vert="horz" lIns="91440" tIns="45720" rIns="91440" bIns="45720" rtlCol="0" anchor="ctr"/>
+          <a:lstStyle>
+            <a:lvl1pPr algn="l">
+              <a:defRPr sz="1400" b="0" i="0" u="none" strike="noStrike"/>
+            </a:lvl1pPr>
+          </a:lstStyle>
+          <a:p>
+            <a:pPr marL="0" indent="0" algn="l">
+              <a:lnSpc>
+                <a:spcPct val="100000"/>
+              </a:lnSpc>
+            </a:pPr>
+            <a:endParaRPr lang="en-US" sz="1400" b="0" i="0" u="none" strike="noStrike" dirty="0">
+              <a:solidFill>
+                <a:srgbClr val="000000"/>
+              </a:solidFill>
+            </a:endParaRPr>
+          </a:p>
+        </p:txBody>
+      </p:sp>
+      <p:sp>
+        <p:nvSpPr>
+          <p:cNvPr id="6" name="Footer Placeholder 5">
+            <a:extLst>
+              <a:ext uri="{FF2B5EF4-FFF2-40B4-BE49-F238E27FC236}">
+                <a16:creationId xmlns:a16="http://schemas.microsoft.com/office/drawing/2014/main" id="{259BF96C-5441-3E95-2957-25B0CCE674B3}"/>
+              </a:ext>
+            </a:extLst>
+          </p:cNvPr>
+          <p:cNvSpPr>
+            <a:spLocks noGrp="1"/>
+          </p:cNvSpPr>
+          <p:nvPr>
+            <p:ph type="ftr" sz="quarter" idx="4"/>
+          </p:nvPr>
+        </p:nvSpPr>
+        <p:spPr>
+          <a:xfrm>
+            <a:off x="0" y="6502400"/>
+            <a:ext cx="3962400" cy="341313"/>
+          </a:xfrm>
+          <a:prstGeom prst="rect">
+            <a:avLst/>
+          </a:prstGeom>
+        </p:spPr>
+        <p:txBody>
+          <a:bodyPr vert="horz" lIns="91440" tIns="45720" rIns="91440" bIns="45720" rtlCol="0" anchor="b"/>
+          <a:lstStyle>
+            <a:lvl1pPr algn="l">
+              <a:defRPr sz="1200"/>
+            </a:lvl1pPr>
+          </a:lstStyle>
+          <a:p>
+            <a:endParaRPr/>
+          </a:p>
+        </p:txBody>
+      </p:sp>
+      <p:sp>
+        <p:nvSpPr>
+          <p:cNvPr id="7" name="Slide Number Placeholder 6">
+            <a:extLst>
+              <a:ext uri="{FF2B5EF4-FFF2-40B4-BE49-F238E27FC236}">
+                <a16:creationId xmlns:a16="http://schemas.microsoft.com/office/drawing/2014/main" id="{89A92A97-06FD-C657-D142-CCC9D2C20386}"/>
+              </a:ext>
+            </a:extLst>
+          </p:cNvPr>
+          <p:cNvSpPr>
+            <a:spLocks noGrp="1"/>
+          </p:cNvSpPr>
+          <p:nvPr>
+            <p:ph type="sldNum" sz="quarter" idx="5"/>
+          </p:nvPr>
+        </p:nvSpPr>
+        <p:spPr>
+          <a:xfrm>
+            <a:off x="5180013" y="6502400"/>
+            <a:ext cx="3962400" cy="341313"/>
+          </a:xfrm>
+          <a:prstGeom prst="rect">
+            <a:avLst/>
+          </a:prstGeom>
+        </p:spPr>
+        <p:txBody>
+          <a:bodyPr vert="horz" lIns="91440" tIns="45720" rIns="91440" bIns="45720" rtlCol="0" anchor="b"/>
+          <a:lstStyle>
+            <a:lvl1pPr algn="r">
+              <a:defRPr sz="1200"/>
+            </a:lvl1pPr>
+          </a:lstStyle>
+          <a:p>
+            <a:r>
+              <a:rPr lang="cs-CZ"/>
+              <a:t>‹#›</a:t>
+            </a:r>
+          </a:p>
+        </p:txBody>
+      </p:sp>
+    </p:spTree>
+    <p:extLst>
+      <p:ext uri="{BB962C8B-B14F-4D97-AF65-F5344CB8AC3E}">
+        <p14:creationId xmlns:p14="http://schemas.microsoft.com/office/powerpoint/2010/main" val="1466724094"/>
+      </p:ext>
+    </p:extLst>
   </p:cSld>
   <p:clrMapOvr>
     <a:masterClrMapping/>
@@ -19292,6 +19568,275 @@
 </p:sld>
 </file>
 
+<file path=ppt/slides/slide7.xml><?xml version="1.0" encoding="utf-8"?>
+<p:sld xmlns:a="http://schemas.openxmlformats.org/drawingml/2006/main" xmlns:r="http://schemas.openxmlformats.org/officeDocument/2006/relationships" xmlns:p="http://schemas.openxmlformats.org/presentationml/2006/main">
+  <p:cSld>
+    <p:bg>
+      <p:bgPr>
+        <a:solidFill>
+          <a:schemeClr val="tx2"/>
+        </a:solidFill>
+        <a:effectLst/>
+      </p:bgPr>
+    </p:bg>
+    <p:spTree>
+      <p:nvGrpSpPr>
+        <p:cNvPr id="1" name="">
+          <a:extLst>
+            <a:ext uri="{FF2B5EF4-FFF2-40B4-BE49-F238E27FC236}">
+              <a16:creationId xmlns:a16="http://schemas.microsoft.com/office/drawing/2014/main" id="{6CFDA081-F576-806D-FCD7-4FE72A99A7E9}"/>
+            </a:ext>
+          </a:extLst>
+        </p:cNvPr>
+        <p:cNvGrpSpPr/>
+        <p:nvPr/>
+      </p:nvGrpSpPr>
+      <p:grpSpPr>
+        <a:xfrm>
+          <a:off x="0" y="0"/>
+          <a:ext cx="0" cy="0"/>
+          <a:chOff x="0" y="0"/>
+          <a:chExt cx="0" cy="0"/>
+        </a:xfrm>
+      </p:grpSpPr>
+      <p:sp>
+        <p:nvSpPr>
+          <p:cNvPr id="2" name="AutoShape 2">
+            <a:extLst>
+              <a:ext uri="{FF2B5EF4-FFF2-40B4-BE49-F238E27FC236}">
+                <a16:creationId xmlns:a16="http://schemas.microsoft.com/office/drawing/2014/main" id="{0DFCBA67-13CD-6392-C042-292941645B17}"/>
+              </a:ext>
+            </a:extLst>
+          </p:cNvPr>
+          <p:cNvSpPr/>
+          <p:nvPr/>
+        </p:nvSpPr>
+        <p:spPr>
+          <a:xfrm>
+            <a:off x="762000" y="635000"/>
+            <a:ext cx="10668000" cy="571500"/>
+          </a:xfrm>
+          <a:prstGeom prst="rect">
+            <a:avLst/>
+          </a:prstGeom>
+          <a:noFill/>
+          <a:ln w="12700" cap="flat" cmpd="sng">
+            <a:noFill/>
+            <a:prstDash val="solid"/>
+            <a:round/>
+          </a:ln>
+        </p:spPr>
+        <p:txBody>
+          <a:bodyPr vert="horz" wrap="square" lIns="0" tIns="0" rIns="0" bIns="0" rtlCol="0" anchor="ctr" anchorCtr="0"/>
+          <a:lstStyle/>
+          <a:p>
+            <a:pPr marL="0" indent="0" algn="l">
+              <a:lnSpc>
+                <a:spcPct val="125000"/>
+              </a:lnSpc>
+              <a:defRPr/>
+            </a:pPr>
+            <a:r>
+              <a:rPr lang="zh-CN" altLang="en-US" sz="3200" b="1" i="0" u="none" strike="noStrike" dirty="0">
+                <a:solidFill>
+                  <a:srgbClr val="333333"/>
+                </a:solidFill>
+                <a:latin typeface="Noto Sans SC"/>
+                <a:ea typeface="Noto Sans SC"/>
+                <a:cs typeface="Noto Sans SC"/>
+                <a:sym typeface="Noto Sans SC"/>
+              </a:rPr>
+              <a:t>成员分工</a:t>
+            </a:r>
+            <a:endParaRPr lang="en-US" sz="1100" dirty="0"/>
+          </a:p>
+        </p:txBody>
+      </p:sp>
+      <p:graphicFrame>
+        <p:nvGraphicFramePr>
+          <p:cNvPr id="21" name="表格 20">
+            <a:extLst>
+              <a:ext uri="{FF2B5EF4-FFF2-40B4-BE49-F238E27FC236}">
+                <a16:creationId xmlns:a16="http://schemas.microsoft.com/office/drawing/2014/main" id="{4B78FA47-AA88-6510-35D9-478A0A1CECF3}"/>
+              </a:ext>
+            </a:extLst>
+          </p:cNvPr>
+          <p:cNvGraphicFramePr>
+            <a:graphicFrameLocks noGrp="1"/>
+          </p:cNvGraphicFramePr>
+          <p:nvPr>
+            <p:extLst>
+              <p:ext uri="{D42A27DB-BD31-4B8C-83A1-F6EECF244321}">
+                <p14:modId xmlns:p14="http://schemas.microsoft.com/office/powerpoint/2010/main" val="3281713786"/>
+              </p:ext>
+            </p:extLst>
+          </p:nvPr>
+        </p:nvGraphicFramePr>
+        <p:xfrm>
+          <a:off x="1857187" y="1849095"/>
+          <a:ext cx="8261724" cy="3159810"/>
+        </p:xfrm>
+        <a:graphic>
+          <a:graphicData uri="http://schemas.openxmlformats.org/drawingml/2006/table">
+            <a:tbl>
+              <a:tblPr firstRow="1" bandRow="1">
+                <a:tableStyleId>{93296810-A885-4BE3-A3E7-6D5BEEA58F35}</a:tableStyleId>
+              </a:tblPr>
+              <a:tblGrid>
+                <a:gridCol w="2753908">
+                  <a:extLst>
+                    <a:ext uri="{9D8B030D-6E8A-4147-A177-3AD203B41FA5}">
+                      <a16:colId xmlns:a16="http://schemas.microsoft.com/office/drawing/2014/main" val="3685927559"/>
+                    </a:ext>
+                  </a:extLst>
+                </a:gridCol>
+                <a:gridCol w="2753908">
+                  <a:extLst>
+                    <a:ext uri="{9D8B030D-6E8A-4147-A177-3AD203B41FA5}">
+                      <a16:colId xmlns:a16="http://schemas.microsoft.com/office/drawing/2014/main" val="259038790"/>
+                    </a:ext>
+                  </a:extLst>
+                </a:gridCol>
+                <a:gridCol w="2753908">
+                  <a:extLst>
+                    <a:ext uri="{9D8B030D-6E8A-4147-A177-3AD203B41FA5}">
+                      <a16:colId xmlns:a16="http://schemas.microsoft.com/office/drawing/2014/main" val="3807183555"/>
+                    </a:ext>
+                  </a:extLst>
+                </a:gridCol>
+              </a:tblGrid>
+              <a:tr h="1285969">
+                <a:tc>
+                  <a:txBody>
+                    <a:bodyPr/>
+                    <a:lstStyle/>
+                    <a:p>
+                      <a:r>
+                        <a:rPr lang="zh-CN" altLang="en-US" sz="3200" dirty="0"/>
+                        <a:t>曹殿卿</a:t>
+                      </a:r>
+                      <a:r>
+                        <a:rPr lang="en-US" altLang="zh-CN" sz="3200" dirty="0"/>
+                        <a:t>-1231001004</a:t>
+                      </a:r>
+                      <a:endParaRPr lang="zh-CN" altLang="en-US" sz="3200" dirty="0"/>
+                    </a:p>
+                  </a:txBody>
+                  <a:tcPr/>
+                </a:tc>
+                <a:tc>
+                  <a:txBody>
+                    <a:bodyPr/>
+                    <a:lstStyle/>
+                    <a:p>
+                      <a:r>
+                        <a:rPr lang="zh-CN" altLang="en-US" sz="3200" dirty="0"/>
+                        <a:t>柴鑫佳</a:t>
+                      </a:r>
+                      <a:r>
+                        <a:rPr lang="en-US" altLang="zh-CN" sz="3200" dirty="0"/>
+                        <a:t>-1231001005</a:t>
+                      </a:r>
+                      <a:endParaRPr lang="zh-CN" altLang="en-US" sz="3200" dirty="0"/>
+                    </a:p>
+                  </a:txBody>
+                  <a:tcPr/>
+                </a:tc>
+                <a:tc>
+                  <a:txBody>
+                    <a:bodyPr/>
+                    <a:lstStyle/>
+                    <a:p>
+                      <a:r>
+                        <a:rPr lang="zh-CN" altLang="en-US" sz="3200" dirty="0"/>
+                        <a:t>程霄扬</a:t>
+                      </a:r>
+                      <a:r>
+                        <a:rPr lang="en-US" altLang="zh-CN" sz="3200" dirty="0"/>
+                        <a:t>-1231001006</a:t>
+                      </a:r>
+                      <a:endParaRPr lang="zh-CN" altLang="en-US" sz="3200" dirty="0"/>
+                    </a:p>
+                  </a:txBody>
+                  <a:tcPr/>
+                </a:tc>
+                <a:extLst>
+                  <a:ext uri="{0D108BD9-81ED-4DB2-BD59-A6C34878D82A}">
+                    <a16:rowId xmlns:a16="http://schemas.microsoft.com/office/drawing/2014/main" val="2440570648"/>
+                  </a:ext>
+                </a:extLst>
+              </a:tr>
+              <a:tr h="1873841">
+                <a:tc>
+                  <a:txBody>
+                    <a:bodyPr/>
+                    <a:lstStyle/>
+                    <a:p>
+                      <a:r>
+                        <a:rPr lang="zh-CN" altLang="en-US" sz="3200" dirty="0"/>
+                        <a:t>报告及</a:t>
+                      </a:r>
+                      <a:r>
+                        <a:rPr lang="en-US" altLang="zh-CN" sz="3200" dirty="0"/>
+                        <a:t>PPT</a:t>
+                      </a:r>
+                      <a:r>
+                        <a:rPr lang="zh-CN" altLang="en-US" sz="3200" dirty="0"/>
+                        <a:t>撰写，总体进度把控</a:t>
+                      </a:r>
+                    </a:p>
+                  </a:txBody>
+                  <a:tcPr/>
+                </a:tc>
+                <a:tc>
+                  <a:txBody>
+                    <a:bodyPr/>
+                    <a:lstStyle/>
+                    <a:p>
+                      <a:r>
+                        <a:rPr lang="zh-CN" altLang="en-US" sz="3200" dirty="0"/>
+                        <a:t>前期汇报准备，代码优化，资料收集</a:t>
+                      </a:r>
+                    </a:p>
+                  </a:txBody>
+                  <a:tcPr/>
+                </a:tc>
+                <a:tc>
+                  <a:txBody>
+                    <a:bodyPr/>
+                    <a:lstStyle/>
+                    <a:p>
+                      <a:r>
+                        <a:rPr lang="zh-CN" altLang="en-US" sz="3200" dirty="0"/>
+                        <a:t>主体代码编写，最终答辩</a:t>
+                      </a:r>
+                    </a:p>
+                  </a:txBody>
+                  <a:tcPr/>
+                </a:tc>
+                <a:extLst>
+                  <a:ext uri="{0D108BD9-81ED-4DB2-BD59-A6C34878D82A}">
+                    <a16:rowId xmlns:a16="http://schemas.microsoft.com/office/drawing/2014/main" val="1465622568"/>
+                  </a:ext>
+                </a:extLst>
+              </a:tr>
+            </a:tbl>
+          </a:graphicData>
+        </a:graphic>
+      </p:graphicFrame>
+    </p:spTree>
+    <p:extLst>
+      <p:ext uri="{BB962C8B-B14F-4D97-AF65-F5344CB8AC3E}">
+        <p14:creationId xmlns:p14="http://schemas.microsoft.com/office/powerpoint/2010/main" val="1480904126"/>
+      </p:ext>
+    </p:extLst>
+  </p:cSld>
+  <p:clrMapOvr>
+    <a:masterClrMapping/>
+  </p:clrMapOvr>
+</p:sld>
+</file>
+
 <file path=ppt/theme/theme1.xml><?xml version="1.0" encoding="utf-8"?>
 <a:theme xmlns:a="http://schemas.openxmlformats.org/drawingml/2006/main" name="Office 主题​​">
   <a:themeElements>
